--- a/output/presentation/Endless_Zombie_MoonStone_Structure_Presentation.pptx
+++ b/output/presentation/Endless_Zombie_MoonStone_Structure_Presentation.pptx
@@ -5,7 +5,7 @@
     <p:sldMasterId id="2147483648" r:id="rId1"/>
   </p:sldMasterIdLst>
   <p:notesMasterIdLst>
-    <p:notesMasterId r:id="rId22"/>
+    <p:notesMasterId r:id="rId21"/>
   </p:notesMasterIdLst>
   <p:sldIdLst>
     <p:sldId id="256" r:id="rId2"/>
@@ -24,27 +24,26 @@
     <p:sldId id="271" r:id="rId15"/>
     <p:sldId id="272" r:id="rId16"/>
     <p:sldId id="273" r:id="rId17"/>
-    <p:sldId id="274" r:id="rId18"/>
-    <p:sldId id="275" r:id="rId19"/>
-    <p:sldId id="276" r:id="rId20"/>
-    <p:sldId id="277" r:id="rId21"/>
+    <p:sldId id="275" r:id="rId18"/>
+    <p:sldId id="276" r:id="rId19"/>
+    <p:sldId id="277" r:id="rId20"/>
   </p:sldIdLst>
   <p:sldSz cx="12192000" cy="6858000"/>
   <p:notesSz cx="6858000" cy="9144000"/>
   <p:embeddedFontLst>
     <p:embeddedFont>
       <p:font typeface="Helvetica Neue" panose="020B0604020202020204" charset="0"/>
-      <p:regular r:id="rId23"/>
-      <p:bold r:id="rId24"/>
-      <p:italic r:id="rId25"/>
-      <p:boldItalic r:id="rId26"/>
+      <p:regular r:id="rId22"/>
+      <p:bold r:id="rId23"/>
+      <p:italic r:id="rId24"/>
+      <p:boldItalic r:id="rId25"/>
     </p:embeddedFont>
     <p:embeddedFont>
       <p:font typeface="Helvetica Neue Light" panose="020B0604020202020204" charset="0"/>
-      <p:regular r:id="rId27"/>
-      <p:bold r:id="rId28"/>
-      <p:italic r:id="rId29"/>
-      <p:boldItalic r:id="rId30"/>
+      <p:regular r:id="rId26"/>
+      <p:bold r:id="rId27"/>
+      <p:italic r:id="rId28"/>
+      <p:boldItalic r:id="rId29"/>
     </p:embeddedFont>
   </p:embeddedFontLst>
   <p:defaultTextStyle>
@@ -488,37 +487,7 @@
               </a:spcAft>
               <a:buNone/>
             </a:pPr>
-            <a:r>
-              <a:t>[Sources]</a:t>
-            </a:r>
-          </a:p>
-          <a:p>
-            <a:pPr marL="0" lvl="0" indent="0" algn="l">
-              <a:spcBef>
-                <a:spcPts val="0"/>
-              </a:spcBef>
-              <a:spcAft>
-                <a:spcPts val="0"/>
-              </a:spcAft>
-              <a:buNone/>
-            </a:pPr>
-            <a:r>
-              <a:t>- Project2_GD1305_Endless_Zombie_Report_EN.pdf (user-provided report)</a:t>
-            </a:r>
-          </a:p>
-          <a:p>
-            <a:pPr marL="0" lvl="0" indent="0" algn="l">
-              <a:spcBef>
-                <a:spcPts val="0"/>
-              </a:spcBef>
-              <a:spcAft>
-                <a:spcPts val="0"/>
-              </a:spcAft>
-              <a:buNone/>
-            </a:pPr>
-            <a:r>
-              <a:t>- GD1305 - Group MoonStone - Presentation Project II.pptx (user-provided structure and visual template)</a:t>
-            </a:r>
+            <a:endParaRPr dirty="0"/>
           </a:p>
         </p:txBody>
       </p:sp>
@@ -602,37 +571,7 @@
               </a:spcAft>
               <a:buNone/>
             </a:pPr>
-            <a:r>
-              <a:t>[Sources]</a:t>
-            </a:r>
-          </a:p>
-          <a:p>
-            <a:pPr marL="0" lvl="0" indent="0" algn="l">
-              <a:spcBef>
-                <a:spcPts val="0"/>
-              </a:spcBef>
-              <a:spcAft>
-                <a:spcPts val="0"/>
-              </a:spcAft>
-              <a:buNone/>
-            </a:pPr>
-            <a:r>
-              <a:t>- Project2_GD1305_Endless_Zombie_Report_EN.pdf (user-provided report)</a:t>
-            </a:r>
-          </a:p>
-          <a:p>
-            <a:pPr marL="0" lvl="0" indent="0" algn="l">
-              <a:spcBef>
-                <a:spcPts val="0"/>
-              </a:spcBef>
-              <a:spcAft>
-                <a:spcPts val="0"/>
-              </a:spcAft>
-              <a:buNone/>
-            </a:pPr>
-            <a:r>
-              <a:t>- GD1305 - Group MoonStone - Presentation Project II.pptx (user-provided structure and visual template)</a:t>
-            </a:r>
+            <a:endParaRPr dirty="0"/>
           </a:p>
         </p:txBody>
       </p:sp>
@@ -716,37 +655,7 @@
               </a:spcAft>
               <a:buNone/>
             </a:pPr>
-            <a:r>
-              <a:t>[Sources]</a:t>
-            </a:r>
-          </a:p>
-          <a:p>
-            <a:pPr marL="0" lvl="0" indent="0" algn="l">
-              <a:spcBef>
-                <a:spcPts val="0"/>
-              </a:spcBef>
-              <a:spcAft>
-                <a:spcPts val="0"/>
-              </a:spcAft>
-              <a:buNone/>
-            </a:pPr>
-            <a:r>
-              <a:t>- Project2_GD1305_Endless_Zombie_Report_EN.pdf (user-provided report)</a:t>
-            </a:r>
-          </a:p>
-          <a:p>
-            <a:pPr marL="0" lvl="0" indent="0" algn="l">
-              <a:spcBef>
-                <a:spcPts val="0"/>
-              </a:spcBef>
-              <a:spcAft>
-                <a:spcPts val="0"/>
-              </a:spcAft>
-              <a:buNone/>
-            </a:pPr>
-            <a:r>
-              <a:t>- GD1305 - Group MoonStone - Presentation Project II.pptx (user-provided structure and visual template)</a:t>
-            </a:r>
+            <a:endParaRPr dirty="0"/>
           </a:p>
         </p:txBody>
       </p:sp>
@@ -830,37 +739,7 @@
               </a:spcAft>
               <a:buNone/>
             </a:pPr>
-            <a:r>
-              <a:t>[Sources]</a:t>
-            </a:r>
-          </a:p>
-          <a:p>
-            <a:pPr marL="0" lvl="0" indent="0" algn="l">
-              <a:spcBef>
-                <a:spcPts val="0"/>
-              </a:spcBef>
-              <a:spcAft>
-                <a:spcPts val="0"/>
-              </a:spcAft>
-              <a:buNone/>
-            </a:pPr>
-            <a:r>
-              <a:t>- Project2_GD1305_Endless_Zombie_Report_EN.pdf (user-provided report)</a:t>
-            </a:r>
-          </a:p>
-          <a:p>
-            <a:pPr marL="0" lvl="0" indent="0" algn="l">
-              <a:spcBef>
-                <a:spcPts val="0"/>
-              </a:spcBef>
-              <a:spcAft>
-                <a:spcPts val="0"/>
-              </a:spcAft>
-              <a:buNone/>
-            </a:pPr>
-            <a:r>
-              <a:t>- GD1305 - Group MoonStone - Presentation Project II.pptx (user-provided structure and visual template)</a:t>
-            </a:r>
+            <a:endParaRPr dirty="0"/>
           </a:p>
         </p:txBody>
       </p:sp>
@@ -944,37 +823,7 @@
               </a:spcAft>
               <a:buNone/>
             </a:pPr>
-            <a:r>
-              <a:t>[Sources]</a:t>
-            </a:r>
-          </a:p>
-          <a:p>
-            <a:pPr marL="0" lvl="0" indent="0" algn="l">
-              <a:spcBef>
-                <a:spcPts val="0"/>
-              </a:spcBef>
-              <a:spcAft>
-                <a:spcPts val="0"/>
-              </a:spcAft>
-              <a:buNone/>
-            </a:pPr>
-            <a:r>
-              <a:t>- Project2_GD1305_Endless_Zombie_Report_EN.pdf (user-provided report)</a:t>
-            </a:r>
-          </a:p>
-          <a:p>
-            <a:pPr marL="0" lvl="0" indent="0" algn="l">
-              <a:spcBef>
-                <a:spcPts val="0"/>
-              </a:spcBef>
-              <a:spcAft>
-                <a:spcPts val="0"/>
-              </a:spcAft>
-              <a:buNone/>
-            </a:pPr>
-            <a:r>
-              <a:t>- GD1305 - Group MoonStone - Presentation Project II.pptx (user-provided structure and visual template)</a:t>
-            </a:r>
+            <a:endParaRPr dirty="0"/>
           </a:p>
         </p:txBody>
       </p:sp>
@@ -1058,37 +907,7 @@
               </a:spcAft>
               <a:buNone/>
             </a:pPr>
-            <a:r>
-              <a:t>[Sources]</a:t>
-            </a:r>
-          </a:p>
-          <a:p>
-            <a:pPr marL="0" lvl="0" indent="0" algn="l">
-              <a:spcBef>
-                <a:spcPts val="0"/>
-              </a:spcBef>
-              <a:spcAft>
-                <a:spcPts val="0"/>
-              </a:spcAft>
-              <a:buNone/>
-            </a:pPr>
-            <a:r>
-              <a:t>- Project2_GD1305_Endless_Zombie_Report_EN.pdf (user-provided report)</a:t>
-            </a:r>
-          </a:p>
-          <a:p>
-            <a:pPr marL="0" lvl="0" indent="0" algn="l">
-              <a:spcBef>
-                <a:spcPts val="0"/>
-              </a:spcBef>
-              <a:spcAft>
-                <a:spcPts val="0"/>
-              </a:spcAft>
-              <a:buNone/>
-            </a:pPr>
-            <a:r>
-              <a:t>- GD1305 - Group MoonStone - Presentation Project II.pptx (user-provided structure and visual template)</a:t>
-            </a:r>
+            <a:endParaRPr dirty="0"/>
           </a:p>
         </p:txBody>
       </p:sp>
@@ -1172,37 +991,7 @@
               </a:spcAft>
               <a:buNone/>
             </a:pPr>
-            <a:r>
-              <a:t>[Sources]</a:t>
-            </a:r>
-          </a:p>
-          <a:p>
-            <a:pPr marL="0" lvl="0" indent="0" algn="l">
-              <a:spcBef>
-                <a:spcPts val="0"/>
-              </a:spcBef>
-              <a:spcAft>
-                <a:spcPts val="0"/>
-              </a:spcAft>
-              <a:buNone/>
-            </a:pPr>
-            <a:r>
-              <a:t>- Project2_GD1305_Endless_Zombie_Report_EN.pdf (user-provided report)</a:t>
-            </a:r>
-          </a:p>
-          <a:p>
-            <a:pPr marL="0" lvl="0" indent="0" algn="l">
-              <a:spcBef>
-                <a:spcPts val="0"/>
-              </a:spcBef>
-              <a:spcAft>
-                <a:spcPts val="0"/>
-              </a:spcAft>
-              <a:buNone/>
-            </a:pPr>
-            <a:r>
-              <a:t>- GD1305 - Group MoonStone - Presentation Project II.pptx (user-provided structure and visual template)</a:t>
-            </a:r>
+            <a:endParaRPr dirty="0"/>
           </a:p>
         </p:txBody>
       </p:sp>
@@ -1286,37 +1075,7 @@
               </a:spcAft>
               <a:buNone/>
             </a:pPr>
-            <a:r>
-              <a:t>[Sources]</a:t>
-            </a:r>
-          </a:p>
-          <a:p>
-            <a:pPr marL="0" lvl="0" indent="0" algn="l">
-              <a:spcBef>
-                <a:spcPts val="0"/>
-              </a:spcBef>
-              <a:spcAft>
-                <a:spcPts val="0"/>
-              </a:spcAft>
-              <a:buNone/>
-            </a:pPr>
-            <a:r>
-              <a:t>- Project2_GD1305_Endless_Zombie_Report_EN.pdf (user-provided report)</a:t>
-            </a:r>
-          </a:p>
-          <a:p>
-            <a:pPr marL="0" lvl="0" indent="0" algn="l">
-              <a:spcBef>
-                <a:spcPts val="0"/>
-              </a:spcBef>
-              <a:spcAft>
-                <a:spcPts val="0"/>
-              </a:spcAft>
-              <a:buNone/>
-            </a:pPr>
-            <a:r>
-              <a:t>- GD1305 - Group MoonStone - Presentation Project II.pptx (user-provided structure and visual template)</a:t>
-            </a:r>
+            <a:endParaRPr dirty="0"/>
           </a:p>
         </p:txBody>
       </p:sp>
@@ -1400,37 +1159,7 @@
               </a:spcAft>
               <a:buNone/>
             </a:pPr>
-            <a:r>
-              <a:t>[Sources]</a:t>
-            </a:r>
-          </a:p>
-          <a:p>
-            <a:pPr marL="0" lvl="0" indent="0" algn="l">
-              <a:spcBef>
-                <a:spcPts val="0"/>
-              </a:spcBef>
-              <a:spcAft>
-                <a:spcPts val="0"/>
-              </a:spcAft>
-              <a:buNone/>
-            </a:pPr>
-            <a:r>
-              <a:t>- Project2_GD1305_Endless_Zombie_Report_EN.pdf (user-provided report)</a:t>
-            </a:r>
-          </a:p>
-          <a:p>
-            <a:pPr marL="0" lvl="0" indent="0" algn="l">
-              <a:spcBef>
-                <a:spcPts val="0"/>
-              </a:spcBef>
-              <a:spcAft>
-                <a:spcPts val="0"/>
-              </a:spcAft>
-              <a:buNone/>
-            </a:pPr>
-            <a:r>
-              <a:t>- GD1305 - Group MoonStone - Presentation Project II.pptx (user-provided structure and visual template)</a:t>
-            </a:r>
+            <a:endParaRPr dirty="0"/>
           </a:p>
         </p:txBody>
       </p:sp>
@@ -1514,37 +1243,7 @@
               </a:spcAft>
               <a:buNone/>
             </a:pPr>
-            <a:r>
-              <a:t>[Sources]</a:t>
-            </a:r>
-          </a:p>
-          <a:p>
-            <a:pPr marL="0" lvl="0" indent="0" algn="l">
-              <a:spcBef>
-                <a:spcPts val="0"/>
-              </a:spcBef>
-              <a:spcAft>
-                <a:spcPts val="0"/>
-              </a:spcAft>
-              <a:buNone/>
-            </a:pPr>
-            <a:r>
-              <a:t>- Project2_GD1305_Endless_Zombie_Report_EN.pdf (user-provided report)</a:t>
-            </a:r>
-          </a:p>
-          <a:p>
-            <a:pPr marL="0" lvl="0" indent="0" algn="l">
-              <a:spcBef>
-                <a:spcPts val="0"/>
-              </a:spcBef>
-              <a:spcAft>
-                <a:spcPts val="0"/>
-              </a:spcAft>
-              <a:buNone/>
-            </a:pPr>
-            <a:r>
-              <a:t>- GD1305 - Group MoonStone - Presentation Project II.pptx (user-provided structure and visual template)</a:t>
-            </a:r>
+            <a:endParaRPr dirty="0"/>
           </a:p>
         </p:txBody>
       </p:sp>
@@ -1628,151 +1327,7 @@
               </a:spcAft>
               <a:buNone/>
             </a:pPr>
-            <a:r>
-              <a:t>[Sources]</a:t>
-            </a:r>
-          </a:p>
-          <a:p>
-            <a:pPr marL="0" lvl="0" indent="0" algn="l">
-              <a:spcBef>
-                <a:spcPts val="0"/>
-              </a:spcBef>
-              <a:spcAft>
-                <a:spcPts val="0"/>
-              </a:spcAft>
-              <a:buNone/>
-            </a:pPr>
-            <a:r>
-              <a:t>- Project2_GD1305_Endless_Zombie_Report_EN.pdf (user-provided report)</a:t>
-            </a:r>
-          </a:p>
-          <a:p>
-            <a:pPr marL="0" lvl="0" indent="0" algn="l">
-              <a:spcBef>
-                <a:spcPts val="0"/>
-              </a:spcBef>
-              <a:spcAft>
-                <a:spcPts val="0"/>
-              </a:spcAft>
-              <a:buNone/>
-            </a:pPr>
-            <a:r>
-              <a:t>- GD1305 - Group MoonStone - Presentation Project II.pptx (user-provided structure and visual template)</a:t>
-            </a:r>
-          </a:p>
-        </p:txBody>
-      </p:sp>
-      <p:sp>
-        <p:nvSpPr>
-          <p:cNvPr id="4" name="Slide Number Placeholder 3"/>
-          <p:cNvSpPr>
-            <a:spLocks noGrp="1"/>
-          </p:cNvSpPr>
-          <p:nvPr>
-            <p:ph type="sldNum" idx="5"/>
-          </p:nvPr>
-        </p:nvSpPr>
-        <p:spPr/>
-        <p:txBody>
-          <a:bodyPr/>
-          <a:lstStyle/>
-          <a:p>
-            <a:endParaRPr/>
-          </a:p>
-        </p:txBody>
-      </p:sp>
-    </p:spTree>
-  </p:cSld>
-  <p:clrMapOvr>
-    <a:masterClrMapping/>
-  </p:clrMapOvr>
-</p:notes>
-</file>
-
-<file path=ppt/notesSlides/notesSlide20.xml><?xml version="1.0" encoding="utf-8"?>
-<p:notes xmlns:a="http://schemas.openxmlformats.org/drawingml/2006/main" xmlns:r="http://schemas.openxmlformats.org/officeDocument/2006/relationships" xmlns:p="http://schemas.openxmlformats.org/presentationml/2006/main">
-  <p:cSld>
-    <p:spTree>
-      <p:nvGrpSpPr>
-        <p:cNvPr id="1" name=""/>
-        <p:cNvGrpSpPr/>
-        <p:nvPr/>
-      </p:nvGrpSpPr>
-      <p:grpSpPr>
-        <a:xfrm>
-          <a:off x="0" y="0"/>
-          <a:ext cx="0" cy="0"/>
-          <a:chOff x="0" y="0"/>
-          <a:chExt cx="0" cy="0"/>
-        </a:xfrm>
-      </p:grpSpPr>
-      <p:sp>
-        <p:nvSpPr>
-          <p:cNvPr id="2" name="Slide Image Placeholder 1"/>
-          <p:cNvSpPr>
-            <a:spLocks noGrp="1" noRot="1" noChangeAspect="1"/>
-          </p:cNvSpPr>
-          <p:nvPr>
-            <p:ph type="sldImg"/>
-          </p:nvPr>
-        </p:nvSpPr>
-        <p:spPr/>
-      </p:sp>
-      <p:sp>
-        <p:nvSpPr>
-          <p:cNvPr id="3" name="Notes Placeholder 2"/>
-          <p:cNvSpPr>
-            <a:spLocks noGrp="1"/>
-          </p:cNvSpPr>
-          <p:nvPr>
-            <p:ph type="body" idx="1"/>
-          </p:nvPr>
-        </p:nvSpPr>
-        <p:spPr/>
-        <p:txBody>
-          <a:bodyPr/>
-          <a:lstStyle/>
-          <a:p>
-            <a:pPr marL="0" lvl="0" indent="0" algn="l">
-              <a:spcBef>
-                <a:spcPts val="0"/>
-              </a:spcBef>
-              <a:spcAft>
-                <a:spcPts val="0"/>
-              </a:spcAft>
-              <a:buNone/>
-            </a:pPr>
-            <a:r>
-              <a:t>[Sources]</a:t>
-            </a:r>
-          </a:p>
-          <a:p>
-            <a:pPr marL="0" lvl="0" indent="0" algn="l">
-              <a:spcBef>
-                <a:spcPts val="0"/>
-              </a:spcBef>
-              <a:spcAft>
-                <a:spcPts val="0"/>
-              </a:spcAft>
-              <a:buNone/>
-            </a:pPr>
-            <a:r>
-              <a:t>- Project2_GD1305_Endless_Zombie_Report_EN.pdf (user-provided report)</a:t>
-            </a:r>
-          </a:p>
-          <a:p>
-            <a:pPr marL="0" lvl="0" indent="0" algn="l">
-              <a:spcBef>
-                <a:spcPts val="0"/>
-              </a:spcBef>
-              <a:spcAft>
-                <a:spcPts val="0"/>
-              </a:spcAft>
-              <a:buNone/>
-            </a:pPr>
-            <a:r>
-              <a:t>- GD1305 - Group MoonStone - Presentation Project II.pptx (user-provided structure and visual template)</a:t>
-            </a:r>
+            <a:endParaRPr dirty="0"/>
           </a:p>
         </p:txBody>
       </p:sp>
@@ -1856,37 +1411,7 @@
               </a:spcAft>
               <a:buNone/>
             </a:pPr>
-            <a:r>
-              <a:t>[Sources]</a:t>
-            </a:r>
-          </a:p>
-          <a:p>
-            <a:pPr marL="0" lvl="0" indent="0" algn="l">
-              <a:spcBef>
-                <a:spcPts val="0"/>
-              </a:spcBef>
-              <a:spcAft>
-                <a:spcPts val="0"/>
-              </a:spcAft>
-              <a:buNone/>
-            </a:pPr>
-            <a:r>
-              <a:t>- Project2_GD1305_Endless_Zombie_Report_EN.pdf (user-provided report)</a:t>
-            </a:r>
-          </a:p>
-          <a:p>
-            <a:pPr marL="0" lvl="0" indent="0" algn="l">
-              <a:spcBef>
-                <a:spcPts val="0"/>
-              </a:spcBef>
-              <a:spcAft>
-                <a:spcPts val="0"/>
-              </a:spcAft>
-              <a:buNone/>
-            </a:pPr>
-            <a:r>
-              <a:t>- GD1305 - Group MoonStone - Presentation Project II.pptx (user-provided structure and visual template)</a:t>
-            </a:r>
+            <a:endParaRPr dirty="0"/>
           </a:p>
         </p:txBody>
       </p:sp>
@@ -1970,37 +1495,7 @@
               </a:spcAft>
               <a:buNone/>
             </a:pPr>
-            <a:r>
-              <a:t>[Sources]</a:t>
-            </a:r>
-          </a:p>
-          <a:p>
-            <a:pPr marL="0" lvl="0" indent="0" algn="l">
-              <a:spcBef>
-                <a:spcPts val="0"/>
-              </a:spcBef>
-              <a:spcAft>
-                <a:spcPts val="0"/>
-              </a:spcAft>
-              <a:buNone/>
-            </a:pPr>
-            <a:r>
-              <a:t>- Project2_GD1305_Endless_Zombie_Report_EN.pdf (user-provided report)</a:t>
-            </a:r>
-          </a:p>
-          <a:p>
-            <a:pPr marL="0" lvl="0" indent="0" algn="l">
-              <a:spcBef>
-                <a:spcPts val="0"/>
-              </a:spcBef>
-              <a:spcAft>
-                <a:spcPts val="0"/>
-              </a:spcAft>
-              <a:buNone/>
-            </a:pPr>
-            <a:r>
-              <a:t>- GD1305 - Group MoonStone - Presentation Project II.pptx (user-provided structure and visual template)</a:t>
-            </a:r>
+            <a:endParaRPr dirty="0"/>
           </a:p>
         </p:txBody>
       </p:sp>
@@ -2084,37 +1579,7 @@
               </a:spcAft>
               <a:buNone/>
             </a:pPr>
-            <a:r>
-              <a:t>[Sources]</a:t>
-            </a:r>
-          </a:p>
-          <a:p>
-            <a:pPr marL="0" lvl="0" indent="0" algn="l">
-              <a:spcBef>
-                <a:spcPts val="0"/>
-              </a:spcBef>
-              <a:spcAft>
-                <a:spcPts val="0"/>
-              </a:spcAft>
-              <a:buNone/>
-            </a:pPr>
-            <a:r>
-              <a:t>- Project2_GD1305_Endless_Zombie_Report_EN.pdf (user-provided report)</a:t>
-            </a:r>
-          </a:p>
-          <a:p>
-            <a:pPr marL="0" lvl="0" indent="0" algn="l">
-              <a:spcBef>
-                <a:spcPts val="0"/>
-              </a:spcBef>
-              <a:spcAft>
-                <a:spcPts val="0"/>
-              </a:spcAft>
-              <a:buNone/>
-            </a:pPr>
-            <a:r>
-              <a:t>- GD1305 - Group MoonStone - Presentation Project II.pptx (user-provided structure and visual template)</a:t>
-            </a:r>
+            <a:endParaRPr dirty="0"/>
           </a:p>
         </p:txBody>
       </p:sp>
@@ -2198,37 +1663,7 @@
               </a:spcAft>
               <a:buNone/>
             </a:pPr>
-            <a:r>
-              <a:t>[Sources]</a:t>
-            </a:r>
-          </a:p>
-          <a:p>
-            <a:pPr marL="0" lvl="0" indent="0" algn="l">
-              <a:spcBef>
-                <a:spcPts val="0"/>
-              </a:spcBef>
-              <a:spcAft>
-                <a:spcPts val="0"/>
-              </a:spcAft>
-              <a:buNone/>
-            </a:pPr>
-            <a:r>
-              <a:t>- Project2_GD1305_Endless_Zombie_Report_EN.pdf (user-provided report)</a:t>
-            </a:r>
-          </a:p>
-          <a:p>
-            <a:pPr marL="0" lvl="0" indent="0" algn="l">
-              <a:spcBef>
-                <a:spcPts val="0"/>
-              </a:spcBef>
-              <a:spcAft>
-                <a:spcPts val="0"/>
-              </a:spcAft>
-              <a:buNone/>
-            </a:pPr>
-            <a:r>
-              <a:t>- GD1305 - Group MoonStone - Presentation Project II.pptx (user-provided structure and visual template)</a:t>
-            </a:r>
+            <a:endParaRPr dirty="0"/>
           </a:p>
         </p:txBody>
       </p:sp>
@@ -2312,37 +1747,7 @@
               </a:spcAft>
               <a:buNone/>
             </a:pPr>
-            <a:r>
-              <a:t>[Sources]</a:t>
-            </a:r>
-          </a:p>
-          <a:p>
-            <a:pPr marL="0" lvl="0" indent="0" algn="l">
-              <a:spcBef>
-                <a:spcPts val="0"/>
-              </a:spcBef>
-              <a:spcAft>
-                <a:spcPts val="0"/>
-              </a:spcAft>
-              <a:buNone/>
-            </a:pPr>
-            <a:r>
-              <a:t>- Project2_GD1305_Endless_Zombie_Report_EN.pdf (user-provided report)</a:t>
-            </a:r>
-          </a:p>
-          <a:p>
-            <a:pPr marL="0" lvl="0" indent="0" algn="l">
-              <a:spcBef>
-                <a:spcPts val="0"/>
-              </a:spcBef>
-              <a:spcAft>
-                <a:spcPts val="0"/>
-              </a:spcAft>
-              <a:buNone/>
-            </a:pPr>
-            <a:r>
-              <a:t>- GD1305 - Group MoonStone - Presentation Project II.pptx (user-provided structure and visual template)</a:t>
-            </a:r>
+            <a:endParaRPr dirty="0"/>
           </a:p>
         </p:txBody>
       </p:sp>
@@ -2426,37 +1831,7 @@
               </a:spcAft>
               <a:buNone/>
             </a:pPr>
-            <a:r>
-              <a:t>[Sources]</a:t>
-            </a:r>
-          </a:p>
-          <a:p>
-            <a:pPr marL="0" lvl="0" indent="0" algn="l">
-              <a:spcBef>
-                <a:spcPts val="0"/>
-              </a:spcBef>
-              <a:spcAft>
-                <a:spcPts val="0"/>
-              </a:spcAft>
-              <a:buNone/>
-            </a:pPr>
-            <a:r>
-              <a:t>- Project2_GD1305_Endless_Zombie_Report_EN.pdf (user-provided report)</a:t>
-            </a:r>
-          </a:p>
-          <a:p>
-            <a:pPr marL="0" lvl="0" indent="0" algn="l">
-              <a:spcBef>
-                <a:spcPts val="0"/>
-              </a:spcBef>
-              <a:spcAft>
-                <a:spcPts val="0"/>
-              </a:spcAft>
-              <a:buNone/>
-            </a:pPr>
-            <a:r>
-              <a:t>- GD1305 - Group MoonStone - Presentation Project II.pptx (user-provided structure and visual template)</a:t>
-            </a:r>
+            <a:endParaRPr dirty="0"/>
           </a:p>
         </p:txBody>
       </p:sp>
@@ -2540,37 +1915,7 @@
               </a:spcAft>
               <a:buNone/>
             </a:pPr>
-            <a:r>
-              <a:t>[Sources]</a:t>
-            </a:r>
-          </a:p>
-          <a:p>
-            <a:pPr marL="0" lvl="0" indent="0" algn="l">
-              <a:spcBef>
-                <a:spcPts val="0"/>
-              </a:spcBef>
-              <a:spcAft>
-                <a:spcPts val="0"/>
-              </a:spcAft>
-              <a:buNone/>
-            </a:pPr>
-            <a:r>
-              <a:t>- Project2_GD1305_Endless_Zombie_Report_EN.pdf (user-provided report)</a:t>
-            </a:r>
-          </a:p>
-          <a:p>
-            <a:pPr marL="0" lvl="0" indent="0" algn="l">
-              <a:spcBef>
-                <a:spcPts val="0"/>
-              </a:spcBef>
-              <a:spcAft>
-                <a:spcPts val="0"/>
-              </a:spcAft>
-              <a:buNone/>
-            </a:pPr>
-            <a:r>
-              <a:t>- GD1305 - Group MoonStone - Presentation Project II.pptx (user-provided structure and visual template)</a:t>
-            </a:r>
+            <a:endParaRPr dirty="0"/>
           </a:p>
         </p:txBody>
       </p:sp>
@@ -13305,6 +12650,7 @@
               <a:buNone/>
             </a:pPr>
             <a:fld id="{00000000-1234-1234-1234-123412341234}" type="slidenum">
+              <a:rPr/>
               <a:t>10</a:t>
             </a:fld>
             <a:endParaRPr/>
@@ -13313,7 +12659,13 @@
       </p:sp>
       <p:pic>
         <p:nvPicPr>
-          <p:cNvPr id="152" name="Picture 2"/>
+          <p:cNvPr id="3" name="Picture 2">
+            <a:extLst>
+              <a:ext uri="{FF2B5EF4-FFF2-40B4-BE49-F238E27FC236}">
+                <a16:creationId xmlns:a16="http://schemas.microsoft.com/office/drawing/2014/main" id="{E55CBAF7-A9D6-5469-0B68-F2281307855C}"/>
+              </a:ext>
+            </a:extLst>
+          </p:cNvPr>
           <p:cNvPicPr>
             <a:picLocks noChangeAspect="1"/>
           </p:cNvPicPr>
@@ -13327,8 +12679,8 @@
         </p:blipFill>
         <p:spPr>
           <a:xfrm>
-            <a:off x="388217" y="2164728"/>
-            <a:ext cx="5756910" cy="3238500"/>
+            <a:off x="2214088" y="1702052"/>
+            <a:ext cx="2077255" cy="4501522"/>
           </a:xfrm>
           <a:prstGeom prst="rect">
             <a:avLst/>
@@ -13337,7 +12689,13 @@
       </p:pic>
       <p:pic>
         <p:nvPicPr>
-          <p:cNvPr id="153" name="Picture 5"/>
+          <p:cNvPr id="5" name="Picture 4">
+            <a:extLst>
+              <a:ext uri="{FF2B5EF4-FFF2-40B4-BE49-F238E27FC236}">
+                <a16:creationId xmlns:a16="http://schemas.microsoft.com/office/drawing/2014/main" id="{DA851A28-0EEE-5308-00FD-791C4AB21795}"/>
+              </a:ext>
+            </a:extLst>
+          </p:cNvPr>
           <p:cNvPicPr>
             <a:picLocks noChangeAspect="1"/>
           </p:cNvPicPr>
@@ -13351,8 +12709,8 @@
         </p:blipFill>
         <p:spPr>
           <a:xfrm>
-            <a:off x="6268937" y="2164728"/>
-            <a:ext cx="5757334" cy="3238500"/>
+            <a:off x="6339702" y="2005829"/>
+            <a:ext cx="3334215" cy="3172268"/>
           </a:xfrm>
           <a:prstGeom prst="rect">
             <a:avLst/>
@@ -13558,6 +12916,7 @@
               <a:buNone/>
             </a:pPr>
             <a:fld id="{00000000-1234-1234-1234-123412341234}" type="slidenum">
+              <a:rPr/>
               <a:t>11</a:t>
             </a:fld>
             <a:endParaRPr/>
@@ -13794,6 +13153,7 @@
               <a:buNone/>
             </a:pPr>
             <a:fld id="{00000000-1234-1234-1234-123412341234}" type="slidenum">
+              <a:rPr/>
               <a:t>12</a:t>
             </a:fld>
             <a:endParaRPr/>
@@ -14234,46 +13594,94 @@
               </a:rPr>
               <a:t>Runtime data stores:</a:t>
             </a:r>
-          </a:p>
-          <a:p>
-            <a:pPr marL="152400" indent="0">
-              <a:spcBef>
-                <a:spcPts val="0"/>
-              </a:spcBef>
-              <a:buSzPts val="2400"/>
-              <a:buNone/>
+            <a:endParaRPr lang="en-GB" sz="2000" b="1" dirty="0">
+              <a:latin typeface="+mn-lt"/>
+              <a:ea typeface="+mn-lt"/>
+              <a:cs typeface="+mn-lt"/>
+            </a:endParaRPr>
+          </a:p>
+          <a:p>
+            <a:pPr marL="952500" lvl="1" indent="-342900">
+              <a:spcBef>
+                <a:spcPts val="0"/>
+              </a:spcBef>
+              <a:buNone/>
+            </a:pPr>
+            <a:endParaRPr lang="en-GB" sz="2000" b="1" dirty="0">
+              <a:latin typeface="+mn-lt"/>
+              <a:ea typeface="+mn-lt"/>
+              <a:cs typeface="+mn-lt"/>
+            </a:endParaRPr>
+          </a:p>
+          <a:p>
+            <a:pPr marL="952500" lvl="1" indent="-342900">
+              <a:lnSpc>
+                <a:spcPct val="150000"/>
+              </a:lnSpc>
+              <a:spcBef>
+                <a:spcPts val="0"/>
+              </a:spcBef>
+              <a:buFontTx/>
+              <a:buChar char="-"/>
             </a:pPr>
             <a:r>
-              <a:rPr sz="2400" b="1" dirty="0">
+              <a:rPr sz="1400" dirty="0">
                 <a:latin typeface="+mn-lt"/>
                 <a:ea typeface="+mn-lt"/>
                 <a:cs typeface="+mn-lt"/>
               </a:rPr>
               <a:t>Player - health, weapons, EXP, and gold</a:t>
             </a:r>
-          </a:p>
-          <a:p>
-            <a:pPr lvl="2">
-              <a:buNone/>
+            <a:endParaRPr lang="en-GB" sz="1400" dirty="0">
+              <a:latin typeface="+mn-lt"/>
+              <a:ea typeface="+mn-lt"/>
+              <a:cs typeface="+mn-lt"/>
+            </a:endParaRPr>
+          </a:p>
+          <a:p>
+            <a:pPr marL="952500" lvl="1" indent="-342900">
+              <a:lnSpc>
+                <a:spcPct val="150000"/>
+              </a:lnSpc>
+              <a:spcBef>
+                <a:spcPts val="0"/>
+              </a:spcBef>
+              <a:buFontTx/>
+              <a:buChar char="-"/>
             </a:pPr>
             <a:r>
-              <a:rPr sz="1400" b="1" dirty="0"/>
+              <a:rPr sz="1400" dirty="0"/>
               <a:t>Enemy - health, speed, target, attack state</a:t>
             </a:r>
-            <a:endParaRPr sz="1400" dirty="0"/>
-          </a:p>
-          <a:p>
-            <a:pPr lvl="2">
-              <a:buNone/>
+            <a:endParaRPr lang="en-GB" sz="1400" dirty="0"/>
+          </a:p>
+          <a:p>
+            <a:pPr marL="952500" lvl="1" indent="-342900">
+              <a:lnSpc>
+                <a:spcPct val="150000"/>
+              </a:lnSpc>
+              <a:spcBef>
+                <a:spcPts val="0"/>
+              </a:spcBef>
+              <a:buFontTx/>
+              <a:buChar char="-"/>
             </a:pPr>
             <a:r>
               <a:rPr sz="1400" dirty="0"/>
               <a:t>Wave - enemy types, count, timing, scaling</a:t>
             </a:r>
-          </a:p>
-          <a:p>
-            <a:pPr lvl="2">
-              <a:buNone/>
+            <a:endParaRPr lang="en-GB" sz="1400" dirty="0"/>
+          </a:p>
+          <a:p>
+            <a:pPr marL="952500" lvl="1" indent="-342900">
+              <a:lnSpc>
+                <a:spcPct val="150000"/>
+              </a:lnSpc>
+              <a:spcBef>
+                <a:spcPts val="0"/>
+              </a:spcBef>
+              <a:buFontTx/>
+              <a:buChar char="-"/>
             </a:pPr>
             <a:r>
               <a:rPr sz="1400" dirty="0"/>
@@ -14552,8 +13960,8 @@
         </p:blipFill>
         <p:spPr>
           <a:xfrm>
-            <a:off x="2919778" y="1940598"/>
-            <a:ext cx="6761583" cy="4577364"/>
+            <a:off x="2919779" y="1940598"/>
+            <a:ext cx="6468152" cy="4378721"/>
           </a:xfrm>
           <a:prstGeom prst="rect">
             <a:avLst/>
@@ -14760,6 +14168,36 @@
           </a:p>
         </p:txBody>
       </p:sp>
+      <p:pic>
+        <p:nvPicPr>
+          <p:cNvPr id="3" name="Picture 2">
+            <a:extLst>
+              <a:ext uri="{FF2B5EF4-FFF2-40B4-BE49-F238E27FC236}">
+                <a16:creationId xmlns:a16="http://schemas.microsoft.com/office/drawing/2014/main" id="{8AD23D17-58A5-88C2-D027-B1E432D2011C}"/>
+              </a:ext>
+            </a:extLst>
+          </p:cNvPr>
+          <p:cNvPicPr>
+            <a:picLocks noChangeAspect="1"/>
+          </p:cNvPicPr>
+          <p:nvPr/>
+        </p:nvPicPr>
+        <p:blipFill>
+          <a:blip r:embed="rId3"/>
+          <a:stretch>
+            <a:fillRect/>
+          </a:stretch>
+        </p:blipFill>
+        <p:spPr>
+          <a:xfrm>
+            <a:off x="1895327" y="926876"/>
+            <a:ext cx="8202170" cy="5106113"/>
+          </a:xfrm>
+          <a:prstGeom prst="rect">
+            <a:avLst/>
+          </a:prstGeom>
+        </p:spPr>
+      </p:pic>
     </p:spTree>
     <p:extLst>
       <p:ext uri="{BB962C8B-B14F-4D97-AF65-F5344CB8AC3E}">
@@ -14774,159 +14212,6 @@
 </file>
 
 <file path=ppt/slides/slide17.xml><?xml version="1.0" encoding="utf-8"?>
-<p:sld xmlns:a="http://schemas.openxmlformats.org/drawingml/2006/main" xmlns:r="http://schemas.openxmlformats.org/officeDocument/2006/relationships" xmlns:p="http://schemas.openxmlformats.org/presentationml/2006/main">
-  <p:cSld>
-    <p:bg>
-      <p:bgPr>
-        <a:solidFill>
-          <a:schemeClr val="lt1"/>
-        </a:solidFill>
-        <a:effectLst/>
-      </p:bgPr>
-    </p:bg>
-    <p:spTree>
-      <p:nvGrpSpPr>
-        <p:cNvPr id="1" name=""/>
-        <p:cNvGrpSpPr/>
-        <p:nvPr/>
-      </p:nvGrpSpPr>
-      <p:grpSpPr>
-        <a:xfrm>
-          <a:off x="0" y="0"/>
-          <a:ext cx="0" cy="0"/>
-          <a:chOff x="0" y="0"/>
-          <a:chExt cx="0" cy="0"/>
-        </a:xfrm>
-      </p:grpSpPr>
-      <p:sp>
-        <p:nvSpPr>
-          <p:cNvPr id="152" name="Google Shape;152;p9">
-            <a:extLst>
-              <a:ext uri="{FF2B5EF4-FFF2-40B4-BE49-F238E27FC236}">
-                <a16:creationId xmlns:a16="http://schemas.microsoft.com/office/drawing/2014/main" id="{3DA29831-3137-7D5D-CAD8-3C6C72965958}"/>
-              </a:ext>
-            </a:extLst>
-          </p:cNvPr>
-          <p:cNvSpPr>
-            <a:spLocks noGrp="1"/>
-          </p:cNvSpPr>
-          <p:nvPr>
-            <p:ph type="title"/>
-          </p:nvPr>
-        </p:nvSpPr>
-        <p:spPr>
-          <a:xfrm>
-            <a:off x="163103" y="263301"/>
-            <a:ext cx="11844998" cy="663575"/>
-          </a:xfrm>
-          <a:prstGeom prst="rect">
-            <a:avLst/>
-          </a:prstGeom>
-          <a:noFill/>
-          <a:ln>
-            <a:noFill/>
-          </a:ln>
-        </p:spPr>
-        <p:txBody>
-          <a:bodyPr spcFirstLastPara="1" wrap="square" lIns="91425" tIns="45700" rIns="91425" bIns="45700" anchor="ctr">
-            <a:normAutofit/>
-          </a:bodyPr>
-          <a:lstStyle/>
-          <a:p>
-            <a:pPr marL="0" lvl="0" indent="0" algn="l">
-              <a:lnSpc>
-                <a:spcPct val="90000"/>
-              </a:lnSpc>
-              <a:spcBef>
-                <a:spcPts val="0"/>
-              </a:spcBef>
-              <a:spcAft>
-                <a:spcPts val="0"/>
-              </a:spcAft>
-              <a:buClr>
-                <a:schemeClr val="lt1"/>
-              </a:buClr>
-              <a:buSzPts val="2800"/>
-              <a:buFont typeface="Helvetica Neue Light"/>
-              <a:buNone/>
-            </a:pPr>
-            <a:r>
-              <a:rPr>
-                <a:latin typeface="+mj-lt"/>
-                <a:ea typeface="+mj-lt"/>
-                <a:cs typeface="+mj-lt"/>
-              </a:rPr>
-              <a:t>IV. TEST</a:t>
-            </a:r>
-          </a:p>
-        </p:txBody>
-      </p:sp>
-      <p:sp>
-        <p:nvSpPr>
-          <p:cNvPr id="154" name="Google Shape;154;p9">
-            <a:extLst>
-              <a:ext uri="{FF2B5EF4-FFF2-40B4-BE49-F238E27FC236}">
-                <a16:creationId xmlns:a16="http://schemas.microsoft.com/office/drawing/2014/main" id="{A0D0337F-F9FF-9CDF-6B29-6669A9243EB1}"/>
-              </a:ext>
-            </a:extLst>
-          </p:cNvPr>
-          <p:cNvSpPr>
-            <a:spLocks noGrp="1"/>
-          </p:cNvSpPr>
-          <p:nvPr>
-            <p:ph type="sldNum" idx="12"/>
-          </p:nvPr>
-        </p:nvSpPr>
-        <p:spPr>
-          <a:xfrm>
-            <a:off x="10654642" y="6517962"/>
-            <a:ext cx="1353459" cy="365125"/>
-          </a:xfrm>
-          <a:prstGeom prst="rect">
-            <a:avLst/>
-          </a:prstGeom>
-          <a:noFill/>
-          <a:ln>
-            <a:noFill/>
-          </a:ln>
-        </p:spPr>
-        <p:txBody>
-          <a:bodyPr spcFirstLastPara="1" wrap="square" lIns="91425" tIns="45700" rIns="91425" bIns="45700" anchor="ctr">
-            <a:noAutofit/>
-          </a:bodyPr>
-          <a:lstStyle/>
-          <a:p>
-            <a:pPr marL="0" lvl="0" indent="0" algn="r">
-              <a:spcBef>
-                <a:spcPts val="0"/>
-              </a:spcBef>
-              <a:spcAft>
-                <a:spcPts val="0"/>
-              </a:spcAft>
-              <a:buNone/>
-            </a:pPr>
-            <a:fld id="{00000000-1234-1234-1234-123412341234}" type="slidenum">
-              <a:rPr/>
-              <a:t>17</a:t>
-            </a:fld>
-            <a:endParaRPr/>
-          </a:p>
-        </p:txBody>
-      </p:sp>
-    </p:spTree>
-    <p:extLst>
-      <p:ext uri="{BB962C8B-B14F-4D97-AF65-F5344CB8AC3E}">
-        <p14:creationId xmlns:p14="http://schemas.microsoft.com/office/powerpoint/2010/main" val="167107085"/>
-      </p:ext>
-    </p:extLst>
-  </p:cSld>
-  <p:clrMapOvr>
-    <a:masterClrMapping/>
-  </p:clrMapOvr>
-</p:sld>
-</file>
-
-<file path=ppt/slides/slide18.xml><?xml version="1.0" encoding="utf-8"?>
 <p:sld xmlns:a="http://schemas.openxmlformats.org/drawingml/2006/main" xmlns:r="http://schemas.openxmlformats.org/officeDocument/2006/relationships" xmlns:p="http://schemas.openxmlformats.org/presentationml/2006/main">
   <p:cSld>
     <p:spTree>
@@ -15172,7 +14457,7 @@
             </a:pPr>
             <a:fld id="{00000000-1234-1234-1234-123412341234}" type="slidenum">
               <a:rPr/>
-              <a:t>18</a:t>
+              <a:t>17</a:t>
             </a:fld>
             <a:endParaRPr/>
           </a:p>
@@ -15191,7 +14476,7 @@
 </p:sld>
 </file>
 
-<file path=ppt/slides/slide19.xml><?xml version="1.0" encoding="utf-8"?>
+<file path=ppt/slides/slide18.xml><?xml version="1.0" encoding="utf-8"?>
 <p:sld xmlns:a="http://schemas.openxmlformats.org/drawingml/2006/main" xmlns:r="http://schemas.openxmlformats.org/officeDocument/2006/relationships" xmlns:p="http://schemas.openxmlformats.org/presentationml/2006/main">
   <p:cSld>
     <p:spTree>
@@ -15240,6 +14525,97 @@
     <p:extLst>
       <p:ext uri="{BB962C8B-B14F-4D97-AF65-F5344CB8AC3E}">
         <p14:creationId xmlns:p14="http://schemas.microsoft.com/office/powerpoint/2010/main" val="463492853"/>
+      </p:ext>
+    </p:extLst>
+  </p:cSld>
+  <p:clrMapOvr>
+    <a:masterClrMapping/>
+  </p:clrMapOvr>
+</p:sld>
+</file>
+
+<file path=ppt/slides/slide19.xml><?xml version="1.0" encoding="utf-8"?>
+<p:sld xmlns:a="http://schemas.openxmlformats.org/drawingml/2006/main" xmlns:r="http://schemas.openxmlformats.org/officeDocument/2006/relationships" xmlns:p="http://schemas.openxmlformats.org/presentationml/2006/main">
+  <p:cSld>
+    <p:spTree>
+      <p:nvGrpSpPr>
+        <p:cNvPr id="1" name=""/>
+        <p:cNvGrpSpPr/>
+        <p:nvPr/>
+      </p:nvGrpSpPr>
+      <p:grpSpPr>
+        <a:xfrm>
+          <a:off x="0" y="0"/>
+          <a:ext cx="0" cy="0"/>
+          <a:chOff x="0" y="0"/>
+          <a:chExt cx="0" cy="0"/>
+        </a:xfrm>
+      </p:grpSpPr>
+      <p:sp>
+        <p:nvSpPr>
+          <p:cNvPr id="198" name="Google Shape;198;p15">
+            <a:extLst>
+              <a:ext uri="{FF2B5EF4-FFF2-40B4-BE49-F238E27FC236}">
+                <a16:creationId xmlns:a16="http://schemas.microsoft.com/office/drawing/2014/main" id="{BF23566A-0ADF-4D3A-A268-2337E6A5F51A}"/>
+              </a:ext>
+            </a:extLst>
+          </p:cNvPr>
+          <p:cNvSpPr>
+            <a:spLocks noGrp="1"/>
+          </p:cNvSpPr>
+          <p:nvPr/>
+        </p:nvSpPr>
+        <p:spPr>
+          <a:xfrm>
+            <a:off x="314179" y="2644170"/>
+            <a:ext cx="11563642" cy="1569660"/>
+          </a:xfrm>
+          <a:prstGeom prst="rect">
+            <a:avLst/>
+          </a:prstGeom>
+          <a:noFill/>
+          <a:ln>
+            <a:noFill/>
+          </a:ln>
+        </p:spPr>
+        <p:txBody>
+          <a:bodyPr spcFirstLastPara="1" wrap="square" lIns="91425" tIns="45700" rIns="91425" bIns="45700" anchor="t">
+            <a:spAutoFit/>
+          </a:bodyPr>
+          <a:lstStyle/>
+          <a:p>
+            <a:pPr marL="0" marR="0" lvl="0" indent="0" algn="ctr">
+              <a:spcBef>
+                <a:spcPts val="0"/>
+              </a:spcBef>
+              <a:spcAft>
+                <a:spcPts val="0"/>
+              </a:spcAft>
+              <a:buNone/>
+            </a:pPr>
+            <a:r>
+              <a:rPr sz="9600" b="0" i="0" u="none" cap="none">
+                <a:solidFill>
+                  <a:schemeClr val="lt1"/>
+                </a:solidFill>
+                <a:latin typeface="+mj-lt"/>
+                <a:ea typeface="+mj-lt"/>
+                <a:cs typeface="+mj-lt"/>
+              </a:rPr>
+              <a:t>Q &amp; A</a:t>
+            </a:r>
+            <a:endParaRPr>
+              <a:latin typeface="+mj-lt"/>
+              <a:ea typeface="+mj-lt"/>
+              <a:cs typeface="+mj-lt"/>
+            </a:endParaRPr>
+          </a:p>
+        </p:txBody>
+      </p:sp>
+    </p:spTree>
+    <p:extLst>
+      <p:ext uri="{BB962C8B-B14F-4D97-AF65-F5344CB8AC3E}">
+        <p14:creationId xmlns:p14="http://schemas.microsoft.com/office/powerpoint/2010/main" val="160843170"/>
       </p:ext>
     </p:extLst>
   </p:cSld>
@@ -15547,6 +14923,7 @@
               <a:buNone/>
             </a:pPr>
             <a:fld id="{00000000-1234-1234-1234-123412341234}" type="slidenum">
+              <a:rPr/>
               <a:t>2</a:t>
             </a:fld>
             <a:endParaRPr/>
@@ -15557,97 +14934,6 @@
     <p:extLst>
       <p:ext uri="{BB962C8B-B14F-4D97-AF65-F5344CB8AC3E}">
         <p14:creationId xmlns:p14="http://schemas.microsoft.com/office/powerpoint/2010/main" val="2028601128"/>
-      </p:ext>
-    </p:extLst>
-  </p:cSld>
-  <p:clrMapOvr>
-    <a:masterClrMapping/>
-  </p:clrMapOvr>
-</p:sld>
-</file>
-
-<file path=ppt/slides/slide20.xml><?xml version="1.0" encoding="utf-8"?>
-<p:sld xmlns:a="http://schemas.openxmlformats.org/drawingml/2006/main" xmlns:r="http://schemas.openxmlformats.org/officeDocument/2006/relationships" xmlns:p="http://schemas.openxmlformats.org/presentationml/2006/main">
-  <p:cSld>
-    <p:spTree>
-      <p:nvGrpSpPr>
-        <p:cNvPr id="1" name=""/>
-        <p:cNvGrpSpPr/>
-        <p:nvPr/>
-      </p:nvGrpSpPr>
-      <p:grpSpPr>
-        <a:xfrm>
-          <a:off x="0" y="0"/>
-          <a:ext cx="0" cy="0"/>
-          <a:chOff x="0" y="0"/>
-          <a:chExt cx="0" cy="0"/>
-        </a:xfrm>
-      </p:grpSpPr>
-      <p:sp>
-        <p:nvSpPr>
-          <p:cNvPr id="198" name="Google Shape;198;p15">
-            <a:extLst>
-              <a:ext uri="{FF2B5EF4-FFF2-40B4-BE49-F238E27FC236}">
-                <a16:creationId xmlns:a16="http://schemas.microsoft.com/office/drawing/2014/main" id="{BF23566A-0ADF-4D3A-A268-2337E6A5F51A}"/>
-              </a:ext>
-            </a:extLst>
-          </p:cNvPr>
-          <p:cNvSpPr>
-            <a:spLocks noGrp="1"/>
-          </p:cNvSpPr>
-          <p:nvPr/>
-        </p:nvSpPr>
-        <p:spPr>
-          <a:xfrm>
-            <a:off x="314179" y="2644170"/>
-            <a:ext cx="11563642" cy="1569660"/>
-          </a:xfrm>
-          <a:prstGeom prst="rect">
-            <a:avLst/>
-          </a:prstGeom>
-          <a:noFill/>
-          <a:ln>
-            <a:noFill/>
-          </a:ln>
-        </p:spPr>
-        <p:txBody>
-          <a:bodyPr spcFirstLastPara="1" wrap="square" lIns="91425" tIns="45700" rIns="91425" bIns="45700" anchor="t">
-            <a:spAutoFit/>
-          </a:bodyPr>
-          <a:lstStyle/>
-          <a:p>
-            <a:pPr marL="0" marR="0" lvl="0" indent="0" algn="ctr">
-              <a:spcBef>
-                <a:spcPts val="0"/>
-              </a:spcBef>
-              <a:spcAft>
-                <a:spcPts val="0"/>
-              </a:spcAft>
-              <a:buNone/>
-            </a:pPr>
-            <a:r>
-              <a:rPr sz="9600" b="0" i="0" u="none" cap="none">
-                <a:solidFill>
-                  <a:schemeClr val="lt1"/>
-                </a:solidFill>
-                <a:latin typeface="+mj-lt"/>
-                <a:ea typeface="+mj-lt"/>
-                <a:cs typeface="+mj-lt"/>
-              </a:rPr>
-              <a:t>Q &amp; A</a:t>
-            </a:r>
-            <a:endParaRPr>
-              <a:latin typeface="+mj-lt"/>
-              <a:ea typeface="+mj-lt"/>
-              <a:cs typeface="+mj-lt"/>
-            </a:endParaRPr>
-          </a:p>
-        </p:txBody>
-      </p:sp>
-    </p:spTree>
-    <p:extLst>
-      <p:ext uri="{BB962C8B-B14F-4D97-AF65-F5344CB8AC3E}">
-        <p14:creationId xmlns:p14="http://schemas.microsoft.com/office/powerpoint/2010/main" val="160843170"/>
       </p:ext>
     </p:extLst>
   </p:cSld>
@@ -15791,7 +15077,7 @@
               <a:buNone/>
             </a:pPr>
             <a:r>
-              <a:rPr sz="2400">
+              <a:rPr sz="2400" dirty="0">
                 <a:latin typeface="+mn-lt"/>
                 <a:ea typeface="+mn-lt"/>
                 <a:cs typeface="+mn-lt"/>
@@ -15810,7 +15096,7 @@
               <a:buSzPts val="2400"/>
               <a:buNone/>
             </a:pPr>
-            <a:endParaRPr sz="2400">
+            <a:endParaRPr sz="2400" dirty="0">
               <a:latin typeface="+mn-lt"/>
               <a:ea typeface="+mn-lt"/>
               <a:cs typeface="+mn-lt"/>
@@ -15828,7 +15114,7 @@
               <a:buNone/>
             </a:pPr>
             <a:r>
-              <a:rPr sz="2400">
+              <a:rPr sz="2400" dirty="0">
                 <a:latin typeface="+mn-lt"/>
                 <a:ea typeface="+mn-lt"/>
                 <a:cs typeface="+mn-lt"/>
@@ -15848,10 +15134,10 @@
               <a:buChar char="-"/>
             </a:pPr>
             <a:r>
-              <a:rPr sz="2000" i="1"/>
+              <a:rPr sz="2000" i="1" dirty="0"/>
               <a:t>Endless Zombie is a third-person survival shooter built with Unity. The player survives escalating enemy waves, switches weapons, gains EXP and gold, and selects upgrades during each run.</a:t>
             </a:r>
-            <a:endParaRPr sz="2000"/>
+            <a:endParaRPr sz="2000" dirty="0"/>
           </a:p>
           <a:p>
             <a:pPr marL="952500" lvl="1" indent="-342900">
@@ -15864,7 +15150,7 @@
               <a:buFontTx/>
               <a:buChar char="-"/>
             </a:pPr>
-            <a:endParaRPr sz="2000"/>
+            <a:endParaRPr sz="2000" dirty="0"/>
           </a:p>
           <a:p>
             <a:pPr marL="952500" lvl="1" indent="-342900">
@@ -15878,8 +15164,8 @@
               <a:buChar char="-"/>
             </a:pPr>
             <a:r>
-              <a:rPr sz="2000"/>
-              <a:t>Objective: survive as long as possible while managing movement, weapons, upgrades, and enemy pressure.</a:t>
+              <a:rPr sz="2000" dirty="0"/>
+              <a:t>Objective: survive as long as possible while managing weapons, upgrades, and enemy pressure.</a:t>
             </a:r>
           </a:p>
         </p:txBody>
@@ -16082,7 +15368,7 @@
               <a:buSzPts val="2400"/>
               <a:buNone/>
             </a:pPr>
-            <a:endParaRPr sz="2400"/>
+            <a:endParaRPr sz="2400" dirty="0"/>
           </a:p>
           <a:p>
             <a:pPr marL="495300" indent="-342900">
@@ -16095,7 +15381,7 @@
               <a:buSzPts val="2400"/>
               <a:buNone/>
             </a:pPr>
-            <a:endParaRPr sz="2400"/>
+            <a:endParaRPr sz="2400" dirty="0"/>
           </a:p>
           <a:p>
             <a:pPr marL="495300" indent="-342900">
@@ -16109,7 +15395,7 @@
               <a:buNone/>
             </a:pPr>
             <a:r>
-              <a:rPr sz="2400"/>
+              <a:rPr sz="2400" dirty="0"/>
               <a:t>Core Gameplay</a:t>
             </a:r>
           </a:p>
@@ -16125,8 +15411,8 @@
               <a:buChar char="-"/>
             </a:pPr>
             <a:r>
-              <a:rPr sz="2000"/>
-              <a:t>Move through the arena and avoid enemy attacks.</a:t>
+              <a:rPr sz="2000" b="1" dirty="0"/>
+              <a:t>Defeat enemies to collect EXP and gold.</a:t>
             </a:r>
           </a:p>
           <a:p>
@@ -16141,9 +15427,10 @@
               <a:buChar char="-"/>
             </a:pPr>
             <a:r>
-              <a:rPr sz="2000" b="1"/>
-              <a:t>Aim and fire multiple weapon types.</a:t>
+              <a:rPr sz="2000" b="1" dirty="0"/>
+              <a:t>Choose upgrades when leveling up.</a:t>
             </a:r>
+            <a:endParaRPr lang="en-GB" sz="2000" b="1" dirty="0"/>
           </a:p>
           <a:p>
             <a:pPr marL="952500" lvl="1" indent="-342900">
@@ -16157,9 +15444,18 @@
               <a:buChar char="-"/>
             </a:pPr>
             <a:r>
-              <a:rPr sz="2000" b="1"/>
-              <a:t>Shotgun fires a pellet spread at close range.</a:t>
+              <a:rPr lang="en-US" sz="2000" b="1" dirty="0">
+                <a:latin typeface="Helvetica Neue" panose="020B0604020202020204" charset="0"/>
+                <a:ea typeface="+mn-lt"/>
+                <a:cs typeface="+mn-lt"/>
+              </a:rPr>
+              <a:t>Buy and upgrade stats each run.</a:t>
             </a:r>
+            <a:endParaRPr sz="2000" b="1" dirty="0">
+              <a:latin typeface="Helvetica Neue" panose="020B0604020202020204" charset="0"/>
+              <a:ea typeface="+mn-lt"/>
+              <a:cs typeface="+mn-lt"/>
+            </a:endParaRPr>
           </a:p>
           <a:p>
             <a:pPr marL="952500" lvl="1" indent="-342900">
@@ -16173,47 +15469,10 @@
               <a:buChar char="-"/>
             </a:pPr>
             <a:r>
-              <a:rPr sz="2000" b="1"/>
-              <a:t>Defeat enemies to collect EXP and gold.</a:t>
-            </a:r>
-          </a:p>
-          <a:p>
-            <a:pPr marL="952500" lvl="1" indent="-342900">
-              <a:lnSpc>
-                <a:spcPct val="120000"/>
-              </a:lnSpc>
-              <a:spcBef>
-                <a:spcPts val="0"/>
-              </a:spcBef>
-              <a:buFontTx/>
-              <a:buChar char="-"/>
-            </a:pPr>
-            <a:r>
-              <a:rPr sz="2000" b="1"/>
-              <a:t>Choose upgrades when leveling up.</a:t>
-            </a:r>
-            <a:endParaRPr sz="2000">
-              <a:latin typeface="+mn-lt"/>
-              <a:ea typeface="+mn-lt"/>
-              <a:cs typeface="+mn-lt"/>
-            </a:endParaRPr>
-          </a:p>
-          <a:p>
-            <a:pPr marL="952500" lvl="1" indent="-342900">
-              <a:lnSpc>
-                <a:spcPct val="120000"/>
-              </a:lnSpc>
-              <a:spcBef>
-                <a:spcPts val="0"/>
-              </a:spcBef>
-              <a:buFontTx/>
-              <a:buChar char="-"/>
-            </a:pPr>
-            <a:r>
-              <a:rPr sz="2000" b="1"/>
+              <a:rPr sz="2000" b="1" dirty="0"/>
               <a:t>Enemy waves become increasingly difficult.</a:t>
             </a:r>
-            <a:endParaRPr sz="2000">
+            <a:endParaRPr sz="2000" dirty="0">
               <a:latin typeface="+mn-lt"/>
               <a:ea typeface="+mn-lt"/>
               <a:cs typeface="+mn-lt"/>
@@ -16266,6 +15525,7 @@
               <a:buNone/>
             </a:pPr>
             <a:fld id="{00000000-1234-1234-1234-123412341234}" type="slidenum">
+              <a:rPr/>
               <a:t>4</a:t>
             </a:fld>
             <a:endParaRPr/>
@@ -17218,7 +16478,13 @@
       </p:sp>
       <p:pic>
         <p:nvPicPr>
-          <p:cNvPr id="135" name="Picture 1"/>
+          <p:cNvPr id="3" name="Picture 2">
+            <a:extLst>
+              <a:ext uri="{FF2B5EF4-FFF2-40B4-BE49-F238E27FC236}">
+                <a16:creationId xmlns:a16="http://schemas.microsoft.com/office/drawing/2014/main" id="{9B875651-8642-9EE3-D018-3BACBEF92019}"/>
+              </a:ext>
+            </a:extLst>
+          </p:cNvPr>
           <p:cNvPicPr>
             <a:picLocks noChangeAspect="1"/>
           </p:cNvPicPr>
@@ -17232,8 +16498,8 @@
         </p:blipFill>
         <p:spPr>
           <a:xfrm>
-            <a:off x="3253404" y="1231302"/>
-            <a:ext cx="5194236" cy="4936415"/>
+            <a:off x="3165480" y="1338729"/>
+            <a:ext cx="5837994" cy="5146478"/>
           </a:xfrm>
           <a:prstGeom prst="rect">
             <a:avLst/>
@@ -17375,7 +16641,7 @@
               <a:buNone/>
             </a:pPr>
             <a:r>
-              <a:rPr b="1"/>
+              <a:rPr b="1" dirty="0"/>
               <a:t>Activity Diagram</a:t>
             </a:r>
           </a:p>
@@ -17426,6 +16692,7 @@
               <a:buNone/>
             </a:pPr>
             <a:fld id="{00000000-1234-1234-1234-123412341234}" type="slidenum">
+              <a:rPr/>
               <a:t>8</a:t>
             </a:fld>
             <a:endParaRPr/>
@@ -17434,7 +16701,13 @@
       </p:sp>
       <p:pic>
         <p:nvPicPr>
-          <p:cNvPr id="143" name="Picture 1"/>
+          <p:cNvPr id="5" name="Picture 4">
+            <a:extLst>
+              <a:ext uri="{FF2B5EF4-FFF2-40B4-BE49-F238E27FC236}">
+                <a16:creationId xmlns:a16="http://schemas.microsoft.com/office/drawing/2014/main" id="{B0042043-0F9F-AFFD-0E8B-36AE7753C35D}"/>
+              </a:ext>
+            </a:extLst>
+          </p:cNvPr>
           <p:cNvPicPr>
             <a:picLocks noChangeAspect="1"/>
           </p:cNvPicPr>
@@ -17448,8 +16721,8 @@
         </p:blipFill>
         <p:spPr>
           <a:xfrm>
-            <a:off x="3918106" y="926876"/>
-            <a:ext cx="4078412" cy="5623961"/>
+            <a:off x="4798170" y="1074057"/>
+            <a:ext cx="2015005" cy="5323854"/>
           </a:xfrm>
           <a:prstGeom prst="rect">
             <a:avLst/>
@@ -17655,6 +16928,7 @@
               <a:buNone/>
             </a:pPr>
             <a:fld id="{00000000-1234-1234-1234-123412341234}" type="slidenum">
+              <a:rPr/>
               <a:t>9</a:t>
             </a:fld>
             <a:endParaRPr/>
@@ -17663,7 +16937,13 @@
       </p:sp>
       <p:pic>
         <p:nvPicPr>
-          <p:cNvPr id="152" name="Picture 1"/>
+          <p:cNvPr id="3" name="Picture 2">
+            <a:extLst>
+              <a:ext uri="{FF2B5EF4-FFF2-40B4-BE49-F238E27FC236}">
+                <a16:creationId xmlns:a16="http://schemas.microsoft.com/office/drawing/2014/main" id="{F83A62CE-7CEA-1BCC-7FFD-0FCC82456AEA}"/>
+              </a:ext>
+            </a:extLst>
+          </p:cNvPr>
           <p:cNvPicPr>
             <a:picLocks noChangeAspect="1"/>
           </p:cNvPicPr>
@@ -17677,8 +16957,8 @@
         </p:blipFill>
         <p:spPr>
           <a:xfrm>
-            <a:off x="438486" y="2160381"/>
-            <a:ext cx="5756910" cy="3238500"/>
+            <a:off x="1943563" y="1594135"/>
+            <a:ext cx="2082710" cy="4498848"/>
           </a:xfrm>
           <a:prstGeom prst="rect">
             <a:avLst/>
@@ -17687,7 +16967,13 @@
       </p:pic>
       <p:pic>
         <p:nvPicPr>
-          <p:cNvPr id="153" name="Picture 3"/>
+          <p:cNvPr id="5" name="Picture 4">
+            <a:extLst>
+              <a:ext uri="{FF2B5EF4-FFF2-40B4-BE49-F238E27FC236}">
+                <a16:creationId xmlns:a16="http://schemas.microsoft.com/office/drawing/2014/main" id="{51EE4248-D997-341C-C9EA-4F7B47E84B97}"/>
+              </a:ext>
+            </a:extLst>
+          </p:cNvPr>
           <p:cNvPicPr>
             <a:picLocks noChangeAspect="1"/>
           </p:cNvPicPr>
@@ -17701,8 +16987,8 @@
         </p:blipFill>
         <p:spPr>
           <a:xfrm>
-            <a:off x="6195396" y="2160381"/>
-            <a:ext cx="5765061" cy="3242847"/>
+            <a:off x="6237625" y="2493090"/>
+            <a:ext cx="3048425" cy="2143424"/>
           </a:xfrm>
           <a:prstGeom prst="rect">
             <a:avLst/>

--- a/output/presentation/Endless_Zombie_MoonStone_Structure_Presentation.pptx
+++ b/output/presentation/Endless_Zombie_MoonStone_Structure_Presentation.pptx
@@ -7,6 +7,9 @@
   <p:notesMasterIdLst>
     <p:notesMasterId r:id="rId21"/>
   </p:notesMasterIdLst>
+  <p:handoutMasterIdLst>
+    <p:handoutMasterId r:id="rId22"/>
+  </p:handoutMasterIdLst>
   <p:sldIdLst>
     <p:sldId id="256" r:id="rId2"/>
     <p:sldId id="257" r:id="rId3"/>
@@ -33,17 +36,17 @@
   <p:embeddedFontLst>
     <p:embeddedFont>
       <p:font typeface="Helvetica Neue" panose="020B0604020202020204" charset="0"/>
-      <p:regular r:id="rId22"/>
-      <p:bold r:id="rId23"/>
-      <p:italic r:id="rId24"/>
-      <p:boldItalic r:id="rId25"/>
+      <p:regular r:id="rId23"/>
+      <p:bold r:id="rId24"/>
+      <p:italic r:id="rId25"/>
+      <p:boldItalic r:id="rId26"/>
     </p:embeddedFont>
     <p:embeddedFont>
       <p:font typeface="Helvetica Neue Light" panose="020B0604020202020204" charset="0"/>
-      <p:regular r:id="rId26"/>
-      <p:bold r:id="rId27"/>
-      <p:italic r:id="rId28"/>
-      <p:boldItalic r:id="rId29"/>
+      <p:regular r:id="rId27"/>
+      <p:bold r:id="rId28"/>
+      <p:italic r:id="rId29"/>
+      <p:boldItalic r:id="rId30"/>
     </p:embeddedFont>
   </p:embeddedFontLst>
   <p:defaultTextStyle>
@@ -149,6 +152,196 @@
 </p:presentation>
 </file>
 
+<file path=ppt/handoutMasters/handoutMaster1.xml><?xml version="1.0" encoding="utf-8"?>
+<p:handoutMaster xmlns:a="http://schemas.openxmlformats.org/drawingml/2006/main" xmlns:r="http://schemas.openxmlformats.org/officeDocument/2006/relationships" xmlns:p="http://schemas.openxmlformats.org/presentationml/2006/main">
+  <p:cSld>
+    <p:bg>
+      <p:bgRef idx="1001">
+        <a:schemeClr val="bg1"/>
+      </p:bgRef>
+    </p:bg>
+    <p:spTree>
+      <p:nvGrpSpPr>
+        <p:cNvPr id="1" name=""/>
+        <p:cNvGrpSpPr/>
+        <p:nvPr/>
+      </p:nvGrpSpPr>
+      <p:grpSpPr>
+        <a:xfrm>
+          <a:off x="0" y="0"/>
+          <a:ext cx="0" cy="0"/>
+          <a:chOff x="0" y="0"/>
+          <a:chExt cx="0" cy="0"/>
+        </a:xfrm>
+      </p:grpSpPr>
+      <p:sp>
+        <p:nvSpPr>
+          <p:cNvPr id="2" name="Header Placeholder 1">
+            <a:extLst>
+              <a:ext uri="{FF2B5EF4-FFF2-40B4-BE49-F238E27FC236}">
+                <a16:creationId xmlns:a16="http://schemas.microsoft.com/office/drawing/2014/main" id="{7F31932D-ECE5-C43C-99D8-1B96B5E4435E}"/>
+              </a:ext>
+            </a:extLst>
+          </p:cNvPr>
+          <p:cNvSpPr>
+            <a:spLocks noGrp="1"/>
+          </p:cNvSpPr>
+          <p:nvPr>
+            <p:ph type="hdr" sz="quarter"/>
+          </p:nvPr>
+        </p:nvSpPr>
+        <p:spPr>
+          <a:xfrm>
+            <a:off x="0" y="0"/>
+            <a:ext cx="2971800" cy="458788"/>
+          </a:xfrm>
+          <a:prstGeom prst="rect">
+            <a:avLst/>
+          </a:prstGeom>
+        </p:spPr>
+        <p:txBody>
+          <a:bodyPr vert="horz" lIns="91440" tIns="45720" rIns="91440" bIns="45720" rtlCol="0"/>
+          <a:lstStyle>
+            <a:lvl1pPr algn="l">
+              <a:defRPr sz="1200"/>
+            </a:lvl1pPr>
+          </a:lstStyle>
+          <a:p>
+            <a:endParaRPr lang="vi-VN"/>
+          </a:p>
+        </p:txBody>
+      </p:sp>
+      <p:sp>
+        <p:nvSpPr>
+          <p:cNvPr id="3" name="Date Placeholder 2">
+            <a:extLst>
+              <a:ext uri="{FF2B5EF4-FFF2-40B4-BE49-F238E27FC236}">
+                <a16:creationId xmlns:a16="http://schemas.microsoft.com/office/drawing/2014/main" id="{284F455C-5546-6519-5EC7-C46C2297C377}"/>
+              </a:ext>
+            </a:extLst>
+          </p:cNvPr>
+          <p:cNvSpPr>
+            <a:spLocks noGrp="1"/>
+          </p:cNvSpPr>
+          <p:nvPr>
+            <p:ph type="dt" sz="quarter" idx="1"/>
+          </p:nvPr>
+        </p:nvSpPr>
+        <p:spPr>
+          <a:xfrm>
+            <a:off x="3884613" y="0"/>
+            <a:ext cx="2971800" cy="458788"/>
+          </a:xfrm>
+          <a:prstGeom prst="rect">
+            <a:avLst/>
+          </a:prstGeom>
+        </p:spPr>
+        <p:txBody>
+          <a:bodyPr vert="horz" lIns="91440" tIns="45720" rIns="91440" bIns="45720" rtlCol="0"/>
+          <a:lstStyle>
+            <a:lvl1pPr algn="r">
+              <a:defRPr sz="1200"/>
+            </a:lvl1pPr>
+          </a:lstStyle>
+          <a:p>
+            <a:fld id="{29510AEB-6B10-4B6E-8153-226DE76F708D}" type="datetimeFigureOut">
+              <a:rPr lang="vi-VN" smtClean="0"/>
+              <a:t>03/09/2026</a:t>
+            </a:fld>
+            <a:endParaRPr lang="vi-VN"/>
+          </a:p>
+        </p:txBody>
+      </p:sp>
+      <p:sp>
+        <p:nvSpPr>
+          <p:cNvPr id="4" name="Footer Placeholder 3">
+            <a:extLst>
+              <a:ext uri="{FF2B5EF4-FFF2-40B4-BE49-F238E27FC236}">
+                <a16:creationId xmlns:a16="http://schemas.microsoft.com/office/drawing/2014/main" id="{B9E611B9-76C0-427B-0E5E-9A59ABE01D39}"/>
+              </a:ext>
+            </a:extLst>
+          </p:cNvPr>
+          <p:cNvSpPr>
+            <a:spLocks noGrp="1"/>
+          </p:cNvSpPr>
+          <p:nvPr>
+            <p:ph type="ftr" sz="quarter" idx="2"/>
+          </p:nvPr>
+        </p:nvSpPr>
+        <p:spPr>
+          <a:xfrm>
+            <a:off x="0" y="8685213"/>
+            <a:ext cx="2971800" cy="458787"/>
+          </a:xfrm>
+          <a:prstGeom prst="rect">
+            <a:avLst/>
+          </a:prstGeom>
+        </p:spPr>
+        <p:txBody>
+          <a:bodyPr vert="horz" lIns="91440" tIns="45720" rIns="91440" bIns="45720" rtlCol="0" anchor="b"/>
+          <a:lstStyle>
+            <a:lvl1pPr algn="l">
+              <a:defRPr sz="1200"/>
+            </a:lvl1pPr>
+          </a:lstStyle>
+          <a:p>
+            <a:endParaRPr lang="vi-VN"/>
+          </a:p>
+        </p:txBody>
+      </p:sp>
+      <p:sp>
+        <p:nvSpPr>
+          <p:cNvPr id="5" name="Slide Number Placeholder 4">
+            <a:extLst>
+              <a:ext uri="{FF2B5EF4-FFF2-40B4-BE49-F238E27FC236}">
+                <a16:creationId xmlns:a16="http://schemas.microsoft.com/office/drawing/2014/main" id="{987A8511-617F-E238-672E-06D8FFF5D62C}"/>
+              </a:ext>
+            </a:extLst>
+          </p:cNvPr>
+          <p:cNvSpPr>
+            <a:spLocks noGrp="1"/>
+          </p:cNvSpPr>
+          <p:nvPr>
+            <p:ph type="sldNum" sz="quarter" idx="3"/>
+          </p:nvPr>
+        </p:nvSpPr>
+        <p:spPr>
+          <a:xfrm>
+            <a:off x="3884613" y="8685213"/>
+            <a:ext cx="2971800" cy="458787"/>
+          </a:xfrm>
+          <a:prstGeom prst="rect">
+            <a:avLst/>
+          </a:prstGeom>
+        </p:spPr>
+        <p:txBody>
+          <a:bodyPr vert="horz" lIns="91440" tIns="45720" rIns="91440" bIns="45720" rtlCol="0" anchor="b"/>
+          <a:lstStyle>
+            <a:lvl1pPr algn="r">
+              <a:defRPr sz="1200"/>
+            </a:lvl1pPr>
+          </a:lstStyle>
+          <a:p>
+            <a:fld id="{9E43EEC7-010A-48E6-9D80-6D1DC8F7E6A2}" type="slidenum">
+              <a:rPr lang="vi-VN" smtClean="0"/>
+              <a:t>‹#›</a:t>
+            </a:fld>
+            <a:endParaRPr lang="vi-VN"/>
+          </a:p>
+        </p:txBody>
+      </p:sp>
+    </p:spTree>
+    <p:extLst>
+      <p:ext uri="{BB962C8B-B14F-4D97-AF65-F5344CB8AC3E}">
+        <p14:creationId xmlns:p14="http://schemas.microsoft.com/office/powerpoint/2010/main" val="2487436845"/>
+      </p:ext>
+    </p:extLst>
+  </p:cSld>
+  <p:clrMap bg1="lt1" tx1="dk1" bg2="lt2" tx2="dk2" accent1="accent1" accent2="accent2" accent3="accent3" accent4="accent4" accent5="accent5" accent6="accent6" hlink="hlink" folHlink="folHlink"/>
+  <p:hf hdr="0" ftr="0" dt="0"/>
+</p:handoutMaster>
+</file>
+
 <file path=ppt/notesMasters/notesMaster1.xml><?xml version="1.0" encoding="utf-8"?>
 <p:notesMaster xmlns:a="http://schemas.openxmlformats.org/drawingml/2006/main" xmlns:r="http://schemas.openxmlformats.org/officeDocument/2006/relationships" xmlns:p="http://schemas.openxmlformats.org/presentationml/2006/main">
   <p:cSld>
@@ -312,6 +505,7 @@
     </p:spTree>
   </p:cSld>
   <p:clrMap bg1="lt1" tx1="dk1" bg2="dk2" tx2="lt2" accent1="accent1" accent2="accent2" accent3="accent3" accent4="accent4" accent5="accent5" accent6="accent6" hlink="hlink" folHlink="folHlink"/>
+  <p:hf hdr="0" ftr="0" dt="0"/>
   <p:notesStyle>
     <a:lvl1pPr marL="0" algn="l" defTabSz="914400" rtl="0" eaLnBrk="1" latinLnBrk="0" hangingPunct="1">
       <a:defRPr sz="1200" kern="1200"/>
@@ -374,6 +568,7 @@
               <a:buNone/>
             </a:pPr>
             <a:r>
+              <a:rPr lang="vi-VN"/>
               <a:t>[Sources]</a:t>
             </a:r>
           </a:p>
@@ -388,6 +583,7 @@
               <a:buNone/>
             </a:pPr>
             <a:r>
+              <a:rPr lang="vi-VN"/>
               <a:t>- Project2_GD1305_Endless_Zombie_Report_EN.pdf (user-provided report)</a:t>
             </a:r>
           </a:p>
@@ -402,8 +598,10 @@
               <a:buNone/>
             </a:pPr>
             <a:r>
+              <a:rPr lang="vi-VN"/>
               <a:t>- GD1305 - Group MoonStone - Presentation Project II.pptx (user-provided structure and visual template)</a:t>
             </a:r>
+            <a:endParaRPr lang="vi-VN" dirty="0"/>
           </a:p>
         </p:txBody>
       </p:sp>
@@ -4268,7 +4466,7 @@
               <a:buNone/>
             </a:pPr>
             <a:r>
-              <a:rPr sz="1200" i="1">
+              <a:rPr sz="1200" i="1" dirty="0">
                 <a:solidFill>
                   <a:srgbClr val="888888"/>
                 </a:solidFill>
@@ -4276,8 +4474,49 @@
                 <a:ea typeface="Helvetica Neue"/>
                 <a:cs typeface="Helvetica Neue"/>
               </a:rPr>
-              <a:t>Team MoonStone – Legend From Below</a:t>
+              <a:t>Team </a:t>
             </a:r>
+            <a:r>
+              <a:rPr sz="1200" i="1" dirty="0" err="1">
+                <a:solidFill>
+                  <a:srgbClr val="888888"/>
+                </a:solidFill>
+                <a:latin typeface="Helvetica Neue"/>
+                <a:ea typeface="Helvetica Neue"/>
+                <a:cs typeface="Helvetica Neue"/>
+              </a:rPr>
+              <a:t>MoonStone</a:t>
+            </a:r>
+            <a:r>
+              <a:rPr sz="1200" i="1" dirty="0">
+                <a:solidFill>
+                  <a:srgbClr val="888888"/>
+                </a:solidFill>
+                <a:latin typeface="Helvetica Neue"/>
+                <a:ea typeface="Helvetica Neue"/>
+                <a:cs typeface="Helvetica Neue"/>
+              </a:rPr>
+              <a:t> – </a:t>
+            </a:r>
+            <a:r>
+              <a:rPr lang="vi-VN" sz="1200" i="1" dirty="0">
+                <a:solidFill>
+                  <a:srgbClr val="888888"/>
+                </a:solidFill>
+                <a:latin typeface="Helvetica Neue"/>
+                <a:ea typeface="Helvetica Neue"/>
+                <a:cs typeface="Helvetica Neue"/>
+              </a:rPr>
+              <a:t>Endless Zombie</a:t>
+            </a:r>
+            <a:endParaRPr sz="1200" i="1" dirty="0">
+              <a:solidFill>
+                <a:srgbClr val="888888"/>
+              </a:solidFill>
+              <a:latin typeface="Helvetica Neue"/>
+              <a:ea typeface="Helvetica Neue"/>
+              <a:cs typeface="Helvetica Neue"/>
+            </a:endParaRPr>
           </a:p>
         </p:txBody>
       </p:sp>
@@ -14766,7 +15005,7 @@
               <a:buAutoNum type="romanUcPeriod"/>
             </a:pPr>
             <a:r>
-              <a:rPr sz="2400" b="1">
+              <a:rPr sz="2400" b="1" dirty="0">
                 <a:latin typeface="+mn-lt"/>
                 <a:ea typeface="+mn-lt"/>
                 <a:cs typeface="+mn-lt"/>
@@ -14793,7 +15032,7 @@
               <a:buAutoNum type="romanUcPeriod"/>
             </a:pPr>
             <a:r>
-              <a:rPr sz="2400" b="1">
+              <a:rPr sz="2400" b="1" dirty="0">
                 <a:latin typeface="+mn-lt"/>
                 <a:ea typeface="+mn-lt"/>
                 <a:cs typeface="+mn-lt"/>
@@ -14820,7 +15059,7 @@
               <a:buAutoNum type="romanUcPeriod"/>
             </a:pPr>
             <a:r>
-              <a:rPr sz="2400" b="1">
+              <a:rPr sz="2400" b="1" dirty="0">
                 <a:latin typeface="+mn-lt"/>
                 <a:ea typeface="+mn-lt"/>
                 <a:cs typeface="+mn-lt"/>
@@ -14847,7 +15086,7 @@
               <a:buAutoNum type="romanUcPeriod"/>
             </a:pPr>
             <a:r>
-              <a:rPr sz="2400" b="1">
+              <a:rPr sz="2400" b="1" dirty="0">
                 <a:latin typeface="+mn-lt"/>
                 <a:ea typeface="+mn-lt"/>
                 <a:cs typeface="+mn-lt"/>
@@ -14868,7 +15107,7 @@
               <a:buAutoNum type="romanUcPeriod"/>
             </a:pPr>
             <a:r>
-              <a:rPr b="1">
+              <a:rPr b="1" dirty="0">
                 <a:latin typeface="+mn-lt"/>
                 <a:ea typeface="+mn-lt"/>
                 <a:cs typeface="+mn-lt"/>
@@ -17546,4 +17785,299 @@
   <a:objectDefaults/>
   <a:extraClrSchemeLst/>
 </a:theme>
+</file>
+
+<file path=ppt/theme/theme3.xml><?xml version="1.0" encoding="utf-8"?>
+<a:theme xmlns:a="http://schemas.openxmlformats.org/drawingml/2006/main" name="Office Theme">
+  <a:themeElements>
+    <a:clrScheme name="Office">
+      <a:dk1>
+        <a:sysClr val="windowText" lastClr="000000"/>
+      </a:dk1>
+      <a:lt1>
+        <a:sysClr val="window" lastClr="FFFFFF"/>
+      </a:lt1>
+      <a:dk2>
+        <a:srgbClr val="44546A"/>
+      </a:dk2>
+      <a:lt2>
+        <a:srgbClr val="E7E6E6"/>
+      </a:lt2>
+      <a:accent1>
+        <a:srgbClr val="4472C4"/>
+      </a:accent1>
+      <a:accent2>
+        <a:srgbClr val="ED7D31"/>
+      </a:accent2>
+      <a:accent3>
+        <a:srgbClr val="A5A5A5"/>
+      </a:accent3>
+      <a:accent4>
+        <a:srgbClr val="FFC000"/>
+      </a:accent4>
+      <a:accent5>
+        <a:srgbClr val="5B9BD5"/>
+      </a:accent5>
+      <a:accent6>
+        <a:srgbClr val="70AD47"/>
+      </a:accent6>
+      <a:hlink>
+        <a:srgbClr val="0563C1"/>
+      </a:hlink>
+      <a:folHlink>
+        <a:srgbClr val="954F72"/>
+      </a:folHlink>
+    </a:clrScheme>
+    <a:fontScheme name="Office">
+      <a:majorFont>
+        <a:latin typeface="Calibri Light" panose="020F0302020204030204"/>
+        <a:ea typeface=""/>
+        <a:cs typeface=""/>
+        <a:font script="Jpan" typeface="游ゴシック Light"/>
+        <a:font script="Hang" typeface="맑은 고딕"/>
+        <a:font script="Hans" typeface="等线 Light"/>
+        <a:font script="Hant" typeface="新細明體"/>
+        <a:font script="Arab" typeface="Times New Roman"/>
+        <a:font script="Hebr" typeface="Times New Roman"/>
+        <a:font script="Thai" typeface="Angsana New"/>
+        <a:font script="Ethi" typeface="Nyala"/>
+        <a:font script="Beng" typeface="Vrinda"/>
+        <a:font script="Gujr" typeface="Shruti"/>
+        <a:font script="Khmr" typeface="MoolBoran"/>
+        <a:font script="Knda" typeface="Tunga"/>
+        <a:font script="Guru" typeface="Raavi"/>
+        <a:font script="Cans" typeface="Euphemia"/>
+        <a:font script="Cher" typeface="Plantagenet Cherokee"/>
+        <a:font script="Yiii" typeface="Microsoft Yi Baiti"/>
+        <a:font script="Tibt" typeface="Microsoft Himalaya"/>
+        <a:font script="Thaa" typeface="MV Boli"/>
+        <a:font script="Deva" typeface="Mangal"/>
+        <a:font script="Telu" typeface="Gautami"/>
+        <a:font script="Taml" typeface="Latha"/>
+        <a:font script="Syrc" typeface="Estrangelo Edessa"/>
+        <a:font script="Orya" typeface="Kalinga"/>
+        <a:font script="Mlym" typeface="Kartika"/>
+        <a:font script="Laoo" typeface="DokChampa"/>
+        <a:font script="Sinh" typeface="Iskoola Pota"/>
+        <a:font script="Mong" typeface="Mongolian Baiti"/>
+        <a:font script="Viet" typeface="Times New Roman"/>
+        <a:font script="Uigh" typeface="Microsoft Uighur"/>
+        <a:font script="Geor" typeface="Sylfaen"/>
+        <a:font script="Armn" typeface="Arial"/>
+        <a:font script="Bugi" typeface="Leelawadee UI"/>
+        <a:font script="Bopo" typeface="Microsoft JhengHei"/>
+        <a:font script="Java" typeface="Javanese Text"/>
+        <a:font script="Lisu" typeface="Segoe UI"/>
+        <a:font script="Mymr" typeface="Myanmar Text"/>
+        <a:font script="Nkoo" typeface="Ebrima"/>
+        <a:font script="Olck" typeface="Nirmala UI"/>
+        <a:font script="Osma" typeface="Ebrima"/>
+        <a:font script="Phag" typeface="Phagspa"/>
+        <a:font script="Syrn" typeface="Estrangelo Edessa"/>
+        <a:font script="Syrj" typeface="Estrangelo Edessa"/>
+        <a:font script="Syre" typeface="Estrangelo Edessa"/>
+        <a:font script="Sora" typeface="Nirmala UI"/>
+        <a:font script="Tale" typeface="Microsoft Tai Le"/>
+        <a:font script="Talu" typeface="Microsoft New Tai Lue"/>
+        <a:font script="Tfng" typeface="Ebrima"/>
+      </a:majorFont>
+      <a:minorFont>
+        <a:latin typeface="Calibri" panose="020F0502020204030204"/>
+        <a:ea typeface=""/>
+        <a:cs typeface=""/>
+        <a:font script="Jpan" typeface="游ゴシック"/>
+        <a:font script="Hang" typeface="맑은 고딕"/>
+        <a:font script="Hans" typeface="等线"/>
+        <a:font script="Hant" typeface="新細明體"/>
+        <a:font script="Arab" typeface="Arial"/>
+        <a:font script="Hebr" typeface="Arial"/>
+        <a:font script="Thai" typeface="Cordia New"/>
+        <a:font script="Ethi" typeface="Nyala"/>
+        <a:font script="Beng" typeface="Vrinda"/>
+        <a:font script="Gujr" typeface="Shruti"/>
+        <a:font script="Khmr" typeface="DaunPenh"/>
+        <a:font script="Knda" typeface="Tunga"/>
+        <a:font script="Guru" typeface="Raavi"/>
+        <a:font script="Cans" typeface="Euphemia"/>
+        <a:font script="Cher" typeface="Plantagenet Cherokee"/>
+        <a:font script="Yiii" typeface="Microsoft Yi Baiti"/>
+        <a:font script="Tibt" typeface="Microsoft Himalaya"/>
+        <a:font script="Thaa" typeface="MV Boli"/>
+        <a:font script="Deva" typeface="Mangal"/>
+        <a:font script="Telu" typeface="Gautami"/>
+        <a:font script="Taml" typeface="Latha"/>
+        <a:font script="Syrc" typeface="Estrangelo Edessa"/>
+        <a:font script="Orya" typeface="Kalinga"/>
+        <a:font script="Mlym" typeface="Kartika"/>
+        <a:font script="Laoo" typeface="DokChampa"/>
+        <a:font script="Sinh" typeface="Iskoola Pota"/>
+        <a:font script="Mong" typeface="Mongolian Baiti"/>
+        <a:font script="Viet" typeface="Arial"/>
+        <a:font script="Uigh" typeface="Microsoft Uighur"/>
+        <a:font script="Geor" typeface="Sylfaen"/>
+        <a:font script="Armn" typeface="Arial"/>
+        <a:font script="Bugi" typeface="Leelawadee UI"/>
+        <a:font script="Bopo" typeface="Microsoft JhengHei"/>
+        <a:font script="Java" typeface="Javanese Text"/>
+        <a:font script="Lisu" typeface="Segoe UI"/>
+        <a:font script="Mymr" typeface="Myanmar Text"/>
+        <a:font script="Nkoo" typeface="Ebrima"/>
+        <a:font script="Olck" typeface="Nirmala UI"/>
+        <a:font script="Osma" typeface="Ebrima"/>
+        <a:font script="Phag" typeface="Phagspa"/>
+        <a:font script="Syrn" typeface="Estrangelo Edessa"/>
+        <a:font script="Syrj" typeface="Estrangelo Edessa"/>
+        <a:font script="Syre" typeface="Estrangelo Edessa"/>
+        <a:font script="Sora" typeface="Nirmala UI"/>
+        <a:font script="Tale" typeface="Microsoft Tai Le"/>
+        <a:font script="Talu" typeface="Microsoft New Tai Lue"/>
+        <a:font script="Tfng" typeface="Ebrima"/>
+      </a:minorFont>
+    </a:fontScheme>
+    <a:fmtScheme name="Office">
+      <a:fillStyleLst>
+        <a:solidFill>
+          <a:schemeClr val="phClr"/>
+        </a:solidFill>
+        <a:gradFill rotWithShape="1">
+          <a:gsLst>
+            <a:gs pos="0">
+              <a:schemeClr val="phClr">
+                <a:lumMod val="110000"/>
+                <a:satMod val="105000"/>
+                <a:tint val="67000"/>
+              </a:schemeClr>
+            </a:gs>
+            <a:gs pos="50000">
+              <a:schemeClr val="phClr">
+                <a:lumMod val="105000"/>
+                <a:satMod val="103000"/>
+                <a:tint val="73000"/>
+              </a:schemeClr>
+            </a:gs>
+            <a:gs pos="100000">
+              <a:schemeClr val="phClr">
+                <a:lumMod val="105000"/>
+                <a:satMod val="109000"/>
+                <a:tint val="81000"/>
+              </a:schemeClr>
+            </a:gs>
+          </a:gsLst>
+          <a:lin ang="5400000" scaled="0"/>
+        </a:gradFill>
+        <a:gradFill rotWithShape="1">
+          <a:gsLst>
+            <a:gs pos="0">
+              <a:schemeClr val="phClr">
+                <a:satMod val="103000"/>
+                <a:lumMod val="102000"/>
+                <a:tint val="94000"/>
+              </a:schemeClr>
+            </a:gs>
+            <a:gs pos="50000">
+              <a:schemeClr val="phClr">
+                <a:satMod val="110000"/>
+                <a:lumMod val="100000"/>
+                <a:shade val="100000"/>
+              </a:schemeClr>
+            </a:gs>
+            <a:gs pos="100000">
+              <a:schemeClr val="phClr">
+                <a:lumMod val="99000"/>
+                <a:satMod val="120000"/>
+                <a:shade val="78000"/>
+              </a:schemeClr>
+            </a:gs>
+          </a:gsLst>
+          <a:lin ang="5400000" scaled="0"/>
+        </a:gradFill>
+      </a:fillStyleLst>
+      <a:lnStyleLst>
+        <a:ln w="6350" cap="flat" cmpd="sng" algn="ctr">
+          <a:solidFill>
+            <a:schemeClr val="phClr"/>
+          </a:solidFill>
+          <a:prstDash val="solid"/>
+          <a:miter lim="800000"/>
+        </a:ln>
+        <a:ln w="12700" cap="flat" cmpd="sng" algn="ctr">
+          <a:solidFill>
+            <a:schemeClr val="phClr"/>
+          </a:solidFill>
+          <a:prstDash val="solid"/>
+          <a:miter lim="800000"/>
+        </a:ln>
+        <a:ln w="19050" cap="flat" cmpd="sng" algn="ctr">
+          <a:solidFill>
+            <a:schemeClr val="phClr"/>
+          </a:solidFill>
+          <a:prstDash val="solid"/>
+          <a:miter lim="800000"/>
+        </a:ln>
+      </a:lnStyleLst>
+      <a:effectStyleLst>
+        <a:effectStyle>
+          <a:effectLst/>
+        </a:effectStyle>
+        <a:effectStyle>
+          <a:effectLst/>
+        </a:effectStyle>
+        <a:effectStyle>
+          <a:effectLst>
+            <a:outerShdw blurRad="57150" dist="19050" dir="5400000" algn="ctr" rotWithShape="0">
+              <a:srgbClr val="000000">
+                <a:alpha val="63000"/>
+              </a:srgbClr>
+            </a:outerShdw>
+          </a:effectLst>
+        </a:effectStyle>
+      </a:effectStyleLst>
+      <a:bgFillStyleLst>
+        <a:solidFill>
+          <a:schemeClr val="phClr"/>
+        </a:solidFill>
+        <a:solidFill>
+          <a:schemeClr val="phClr">
+            <a:tint val="95000"/>
+            <a:satMod val="170000"/>
+          </a:schemeClr>
+        </a:solidFill>
+        <a:gradFill rotWithShape="1">
+          <a:gsLst>
+            <a:gs pos="0">
+              <a:schemeClr val="phClr">
+                <a:tint val="93000"/>
+                <a:satMod val="150000"/>
+                <a:shade val="98000"/>
+                <a:lumMod val="102000"/>
+              </a:schemeClr>
+            </a:gs>
+            <a:gs pos="50000">
+              <a:schemeClr val="phClr">
+                <a:tint val="98000"/>
+                <a:satMod val="130000"/>
+                <a:shade val="90000"/>
+                <a:lumMod val="103000"/>
+              </a:schemeClr>
+            </a:gs>
+            <a:gs pos="100000">
+              <a:schemeClr val="phClr">
+                <a:shade val="63000"/>
+                <a:satMod val="120000"/>
+              </a:schemeClr>
+            </a:gs>
+          </a:gsLst>
+          <a:lin ang="5400000" scaled="0"/>
+        </a:gradFill>
+      </a:bgFillStyleLst>
+    </a:fmtScheme>
+  </a:themeElements>
+  <a:objectDefaults/>
+  <a:extraClrSchemeLst/>
+  <a:extLst>
+    <a:ext uri="{05A4C25C-085E-4340-85A3-A5531E510DB2}">
+      <thm15:themeFamily xmlns:thm15="http://schemas.microsoft.com/office/thememl/2012/main" name="Office Theme" id="{62F939B6-93AF-4DB8-9C6B-D6C7DFDC589F}" vid="{4A3C46E8-61CC-4603-A589-7422A47A8E4A}"/>
+    </a:ext>
+  </a:extLst>
+</a:theme>
 </file>